--- a/docs/Crypto_Market_Analysis_Final_Evaluation.pptx
+++ b/docs/Crypto_Market_Analysis_Final_Evaluation.pptx
@@ -2592,7 +2592,46 @@
         </p:nvSpPr>
         <p:spPr>
           <a:xfrm>
-            <a:off x="640080" y="5212080"/>
+            <a:off x="640080" y="4892040"/>
+            <a:ext cx="8229600" cy="365760"/>
+          </a:xfrm>
+          <a:prstGeom prst="rect">
+            <a:avLst/>
+          </a:prstGeom>
+          <a:noFill/>
+          <a:ln/>
+        </p:spPr>
+        <p:txBody>
+          <a:bodyPr wrap="square" lIns="0" tIns="0" rIns="0" bIns="0" rtlCol="0" anchor="ctr"/>
+          <a:lstStyle/>
+          <a:p>
+            <a:pPr indent="0" marL="0">
+              <a:buNone/>
+            </a:pPr>
+            <a:r>
+              <a:rPr lang="en-US" sz="1600" b="1" dirty="0">
+                <a:solidFill>
+                  <a:srgbClr val="00BCD4"/>
+                </a:solidFill>
+                <a:latin typeface="Calibri" pitchFamily="34" charset="0"/>
+                <a:ea typeface="Calibri" pitchFamily="34" charset="-122"/>
+                <a:cs typeface="Calibri" pitchFamily="34" charset="-120"/>
+              </a:rPr>
+              <a:t>cryptomarketanalysis.streamlit.app</a:t>
+            </a:r>
+            <a:endParaRPr lang="en-US" sz="1600" dirty="0"/>
+          </a:p>
+        </p:txBody>
+      </p:sp>
+      <p:sp>
+        <p:nvSpPr>
+          <p:cNvPr id="6" name="Text 4"/>
+          <p:cNvSpPr txBox="1"/>
+          <p:nvPr/>
+        </p:nvSpPr>
+        <p:spPr>
+          <a:xfrm>
+            <a:off x="640080" y="5394960"/>
             <a:ext cx="8229600" cy="731520"/>
           </a:xfrm>
           <a:prstGeom prst="rect">
@@ -5032,7 +5071,7 @@
                 <a:ea typeface="Cambria" pitchFamily="34" charset="-122"/>
                 <a:cs typeface="Cambria" pitchFamily="34" charset="-120"/>
               </a:rPr>
-              <a:t>Dated, not stale</a:t>
+              <a:t>Deployed and public</a:t>
             </a:r>
             <a:endParaRPr lang="en-US" sz="1700" dirty="0"/>
           </a:p>
@@ -5074,7 +5113,7 @@
                 <a:ea typeface="Calibri" pitchFamily="34" charset="-122"/>
                 <a:cs typeface="Calibri" pitchFamily="34" charset="-120"/>
               </a:rPr>
-              <a:t>The Datasets tab states the exact range each feed covers, so no figure is passed off as more current than it is.</a:t>
+              <a:t>Live at cryptomarketanalysis.streamlit.app, serving the same cached snapshot the repository ships with.</a:t>
             </a:r>
             <a:endParaRPr lang="en-US" sz="1200" dirty="0"/>
           </a:p>

--- a/docs/Crypto_Market_Analysis_Final_Evaluation.pptx
+++ b/docs/Crypto_Market_Analysis_Final_Evaluation.pptx
@@ -3778,7 +3778,7 @@
                 <a:ea typeface="Cambria" pitchFamily="34" charset="-122"/>
                 <a:cs typeface="Cambria" pitchFamily="34" charset="-120"/>
               </a:rPr>
-              <a:t>209</a:t>
+              <a:t>220</a:t>
             </a:r>
             <a:endParaRPr lang="en-US" sz="4000" dirty="0"/>
           </a:p>
@@ -6185,7 +6185,7 @@
                 <a:ea typeface="Cambria" pitchFamily="34" charset="-122"/>
                 <a:cs typeface="Cambria" pitchFamily="34" charset="-120"/>
               </a:rPr>
-              <a:t>The finding</a:t>
+              <a:t>The hypothesis</a:t>
             </a:r>
             <a:endParaRPr lang="en-US" sz="1800" dirty="0"/>
           </a:p>
@@ -6227,7 +6227,7 @@
                 <a:ea typeface="Calibri" pitchFamily="34" charset="-122"/>
                 <a:cs typeface="Calibri" pitchFamily="34" charset="-120"/>
               </a:rPr>
-              <a:t>Crypto's diversification benefit is regime-dependent. Correlation with equities rises for all six assets on the benchmark's worst days — exactly when a hedge would matter.</a:t>
+              <a:t>Crypto's diversification may be regime-dependent — correlation is higher for all six assets when equities fall hardest. Tested, it does not reach significance on 25 days. Reported as such.</a:t>
             </a:r>
             <a:endParaRPr lang="en-US" sz="1250" dirty="0"/>
           </a:p>
@@ -6372,7 +6372,7 @@
                 <a:ea typeface="Calibri" pitchFamily="34" charset="-122"/>
                 <a:cs typeface="Calibri" pitchFamily="34" charset="-120"/>
               </a:rPr>
-              <a:t>Time-ordered validation, baselines that are hard to beat by accident, and explicit skill scores. Negative results reported as results.</a:t>
+              <a:t>Time-ordered validation, baselines hard to beat by accident, explicit skill scores, and significance testing on the one result we might otherwise have overclaimed.</a:t>
             </a:r>
             <a:endParaRPr lang="en-US" sz="1250" dirty="0"/>
           </a:p>
@@ -6517,7 +6517,7 @@
                 <a:ea typeface="Calibri" pitchFamily="34" charset="-122"/>
                 <a:cs typeface="Calibri" pitchFamily="34" charset="-120"/>
               </a:rPr>
-              <a:t>209 tests, five live feeds, rupee denomination, and a system that opens in a tenth of a second with no credentials and no network.</a:t>
+              <a:t>220 tests, five live feeds, rupee denomination, and a system that opens in a tenth of a second with no credentials and no network.</a:t>
             </a:r>
             <a:endParaRPr lang="en-US" sz="1250" dirty="0"/>
           </a:p>
@@ -12285,7 +12285,7 @@
                 <a:ea typeface="Calibri" pitchFamily="34" charset="-122"/>
                 <a:cs typeface="Calibri" pitchFamily="34" charset="-120"/>
               </a:rPr>
-              <a:t>FEATURE 03 — PRINCIPAL FINDING</a:t>
+              <a:t>FEATURE 03</a:t>
             </a:r>
             <a:endParaRPr lang="en-US" sz="1200" dirty="0"/>
           </a:p>
@@ -12324,7 +12324,7 @@
                 <a:ea typeface="Cambria" pitchFamily="34" charset="-122"/>
                 <a:cs typeface="Cambria" pitchFamily="34" charset="-120"/>
               </a:rPr>
-              <a:t>Diversification that fails when it is needed</a:t>
+              <a:t>A pattern the sample cannot confirm</a:t>
             </a:r>
             <a:endParaRPr lang="en-US" sz="3200" dirty="0"/>
           </a:p>
@@ -12366,7 +12366,7 @@
                 <a:ea typeface="Calibri" pitchFamily="34" charset="-122"/>
                 <a:cs typeface="Calibri" pitchFamily="34" charset="-120"/>
               </a:rPr>
-              <a:t>Full-sample correlation against traditional assets sits between −0.11 and +0.11: apparently near-perfect diversification. Splitting the sample by market regime contradicts that reading entirely.</a:t>
+              <a:t>Full-sample correlation sits between −0.11 and +0.11 — apparently near-perfect diversification. Splitting by market regime points the other way for all six assets. Tested properly, it does not hold.</a:t>
             </a:r>
             <a:endParaRPr lang="en-US" sz="1350" dirty="0"/>
           </a:p>
@@ -12448,7 +12448,7 @@
                 <a:ea typeface="Cambria" pitchFamily="34" charset="-122"/>
                 <a:cs typeface="Cambria" pitchFamily="34" charset="-120"/>
               </a:rPr>
-              <a:t>What the split shows</a:t>
+              <a:t>Why we don't claim it</a:t>
             </a:r>
             <a:endParaRPr lang="en-US" sz="1600" dirty="0"/>
           </a:p>
@@ -12494,7 +12494,7 @@
                 <a:ea typeface="Calibri" pitchFamily="34" charset="-122"/>
                 <a:cs typeface="Calibri" pitchFamily="34" charset="-120"/>
               </a:rPr>
-              <a:t>Correlation rises for all six assets — without exception — on the benchmark's worst days.</a:t>
+              <a:t>Correlation is higher for all six assets on the benchmark's worst days.</a:t>
             </a:r>
             <a:endParaRPr lang="en-US" sz="1200" dirty="0"/>
           </a:p>
@@ -12518,7 +12518,7 @@
                 <a:ea typeface="Calibri" pitchFamily="34" charset="-122"/>
                 <a:cs typeface="Calibri" pitchFamily="34" charset="-120"/>
               </a:rPr>
-              <a:t>The apparent diversification benefit weakens precisely when a hedge would matter most.</a:t>
+              <a:t>But no asset reaches p &lt; 0.17 on a Fisher z-test or a 5,000-draw permutation test. Every CI contains zero.</a:t>
             </a:r>
             <a:endParaRPr lang="en-US" sz="1200" dirty="0"/>
           </a:p>
@@ -12542,38 +12542,23 @@
                 <a:ea typeface="Calibri" pitchFamily="34" charset="-122"/>
                 <a:cs typeface="Calibri" pitchFamily="34" charset="-120"/>
               </a:rPr>
-              <a:t>A single full-sample coefficient conceals this completely.</a:t>
+              <a:t>The six correlate 0.65–0.90 with each other, so six agreeing signs is one observation repeated, not six.</a:t>
             </a:r>
             <a:endParaRPr lang="en-US" sz="1200" dirty="0"/>
           </a:p>
-        </p:txBody>
-      </p:sp>
-      <p:sp>
-        <p:nvSpPr>
-          <p:cNvPr id="9" name="Text 6"/>
-          <p:cNvSpPr txBox="1"/>
-          <p:nvPr/>
-        </p:nvSpPr>
-        <p:spPr>
-          <a:xfrm>
-            <a:off x="640080" y="6199632"/>
-            <a:ext cx="10881360" cy="310896"/>
-          </a:xfrm>
-          <a:prstGeom prst="rect">
-            <a:avLst/>
-          </a:prstGeom>
-          <a:noFill/>
-          <a:ln/>
-        </p:spPr>
-        <p:txBody>
-          <a:bodyPr wrap="square" lIns="0" tIns="0" rIns="0" bIns="0" rtlCol="0" anchor="ctr"/>
-          <a:lstStyle/>
-          <a:p>
-            <a:pPr indent="0" marL="0">
-              <a:buNone/>
-            </a:pPr>
-            <a:r>
-              <a:rPr lang="en-US" sz="1050" i="1" dirty="0">
+          <a:p>
+            <a:pPr marL="342900" indent="-342900">
+              <a:lnSpc>
+                <a:spcPts val="1600"/>
+              </a:lnSpc>
+              <a:spcAft>
+                <a:spcPts val="1200"/>
+              </a:spcAft>
+              <a:buSzPct val="100000"/>
+              <a:buChar char="•"/>
+            </a:pPr>
+            <a:r>
+              <a:rPr lang="en-US" sz="1200" dirty="0">
                 <a:solidFill>
                   <a:srgbClr val="607D8B"/>
                 </a:solidFill>
@@ -12581,7 +12566,46 @@
                 <a:ea typeface="Calibri" pitchFamily="34" charset="-122"/>
                 <a:cs typeface="Calibri" pitchFamily="34" charset="-120"/>
               </a:rPr>
-              <a:t>249 aligned trading days. Stress is the worst decile of benchmark performance. Direction is consistent across all six assets; magnitude for any single asset carries wide uncertainty at 25 observations.</a:t>
+              <a:t>BTC's stressed figure swings +0.08 to +0.53 across history windows.</a:t>
+            </a:r>
+            <a:endParaRPr lang="en-US" sz="1200" dirty="0"/>
+          </a:p>
+        </p:txBody>
+      </p:sp>
+      <p:sp>
+        <p:nvSpPr>
+          <p:cNvPr id="9" name="Text 6"/>
+          <p:cNvSpPr txBox="1"/>
+          <p:nvPr/>
+        </p:nvSpPr>
+        <p:spPr>
+          <a:xfrm>
+            <a:off x="640080" y="6199632"/>
+            <a:ext cx="10881360" cy="310896"/>
+          </a:xfrm>
+          <a:prstGeom prst="rect">
+            <a:avLst/>
+          </a:prstGeom>
+          <a:noFill/>
+          <a:ln/>
+        </p:spPr>
+        <p:txBody>
+          <a:bodyPr wrap="square" lIns="0" tIns="0" rIns="0" bIns="0" rtlCol="0" anchor="ctr"/>
+          <a:lstStyle/>
+          <a:p>
+            <a:pPr indent="0" marL="0">
+              <a:buNone/>
+            </a:pPr>
+            <a:r>
+              <a:rPr lang="en-US" sz="1050" i="1" dirty="0">
+                <a:solidFill>
+                  <a:srgbClr val="607D8B"/>
+                </a:solidFill>
+                <a:latin typeface="Calibri" pitchFamily="34" charset="0"/>
+                <a:ea typeface="Calibri" pitchFamily="34" charset="-122"/>
+                <a:cs typeface="Calibri" pitchFamily="34" charset="-120"/>
+              </a:rPr>
+              <a:t>249 aligned trading days; 25 stressed. Reported as a directional hypothesis worth testing on a longer sample, not as a result. The system now withholds any regime correlation computed on fewer than 20 observations.</a:t>
             </a:r>
             <a:endParaRPr lang="en-US" sz="1050" dirty="0"/>
           </a:p>
@@ -13526,7 +13550,7 @@
                 <a:ea typeface="Calibri" pitchFamily="34" charset="-122"/>
                 <a:cs typeface="Calibri" pitchFamily="34" charset="-120"/>
               </a:rPr>
-              <a:t>This is the correct finding for daily crypto returns, not a defect. The dashboard states it in words, and presents the interval as a range of outcomes rather than a price target.</a:t>
+              <a:t>For Bitcoin, AIC selects order (0,1,0) — which IS a random walk. Model and baseline are the same object; skill is exactly 0.000000. Other coins select real orders and all post negative skill.</a:t>
             </a:r>
             <a:endParaRPr lang="en-US" sz="1300" dirty="0"/>
           </a:p>
@@ -14141,7 +14165,7 @@
                           <a:ea typeface="Calibri" pitchFamily="34" charset="-122"/>
                           <a:cs typeface="Calibri" pitchFamily="34" charset="-120"/>
                         </a:rPr>
-                        <a:t>46.9%</a:t>
+                        <a:t>47.7%</a:t>
                       </a:r>
                       <a:endParaRPr lang="en-US" sz="1150" dirty="0">
                         <a:latin typeface="Calibri" charset="0"/>
@@ -14277,7 +14301,7 @@
                           <a:ea typeface="Calibri" pitchFamily="34" charset="-122"/>
                           <a:cs typeface="Calibri" pitchFamily="34" charset="-120"/>
                         </a:rPr>
-                        <a:t>−3.5%</a:t>
+                        <a:t>−2.7%</a:t>
                       </a:r>
                       <a:endParaRPr lang="en-US" sz="1150" dirty="0">
                         <a:latin typeface="Calibri" charset="0"/>
@@ -14345,7 +14369,7 @@
                           <a:ea typeface="Calibri" pitchFamily="34" charset="-122"/>
                           <a:cs typeface="Calibri" pitchFamily="34" charset="-120"/>
                         </a:rPr>
-                        <a:t>0.462</a:t>
+                        <a:t>0.465</a:t>
                       </a:r>
                       <a:endParaRPr lang="en-US" sz="1150" dirty="0">
                         <a:latin typeface="Calibri" charset="0"/>
@@ -14483,7 +14507,7 @@
                           <a:ea typeface="Calibri" pitchFamily="34" charset="-122"/>
                           <a:cs typeface="Calibri" pitchFamily="34" charset="-120"/>
                         </a:rPr>
-                        <a:t>43.8%</a:t>
+                        <a:t>46.9%</a:t>
                       </a:r>
                       <a:endParaRPr lang="en-US" sz="1150" dirty="0">
                         <a:latin typeface="Calibri" charset="0"/>
@@ -14619,7 +14643,7 @@
                           <a:ea typeface="Calibri" pitchFamily="34" charset="-122"/>
                           <a:cs typeface="Calibri" pitchFamily="34" charset="-120"/>
                         </a:rPr>
-                        <a:t>−6.5%</a:t>
+                        <a:t>−3.5%</a:t>
                       </a:r>
                       <a:endParaRPr lang="en-US" sz="1150" dirty="0">
                         <a:latin typeface="Calibri" charset="0"/>
@@ -14687,7 +14711,7 @@
                           <a:ea typeface="Calibri" pitchFamily="34" charset="-122"/>
                           <a:cs typeface="Calibri" pitchFamily="34" charset="-120"/>
                         </a:rPr>
-                        <a:t>0.453</a:t>
+                        <a:t>0.466</a:t>
                       </a:r>
                       <a:endParaRPr lang="en-US" sz="1150" dirty="0">
                         <a:latin typeface="Calibri" charset="0"/>
@@ -14825,7 +14849,7 @@
                           <a:ea typeface="Calibri" pitchFamily="34" charset="-122"/>
                           <a:cs typeface="Calibri" pitchFamily="34" charset="-120"/>
                         </a:rPr>
-                        <a:t>49.2%</a:t>
+                        <a:t>43.5%</a:t>
                       </a:r>
                       <a:endParaRPr lang="en-US" sz="1150" dirty="0">
                         <a:latin typeface="Calibri" charset="0"/>
@@ -14961,7 +14985,7 @@
                           <a:ea typeface="Calibri" pitchFamily="34" charset="-122"/>
                           <a:cs typeface="Calibri" pitchFamily="34" charset="-120"/>
                         </a:rPr>
-                        <a:t>−1.2%</a:t>
+                        <a:t>−6.9%</a:t>
                       </a:r>
                       <a:endParaRPr lang="en-US" sz="1150" dirty="0">
                         <a:latin typeface="Calibri" charset="0"/>
@@ -15029,7 +15053,7 @@
                           <a:ea typeface="Calibri" pitchFamily="34" charset="-122"/>
                           <a:cs typeface="Calibri" pitchFamily="34" charset="-120"/>
                         </a:rPr>
-                        <a:t>0.491</a:t>
+                        <a:t>0.452</a:t>
                       </a:r>
                       <a:endParaRPr lang="en-US" sz="1150" dirty="0">
                         <a:latin typeface="Calibri" charset="0"/>
@@ -15167,7 +15191,7 @@
                           <a:ea typeface="Calibri" pitchFamily="34" charset="-122"/>
                           <a:cs typeface="Calibri" pitchFamily="34" charset="-120"/>
                         </a:rPr>
-                        <a:t>53.5%</a:t>
+                        <a:t>53.8%</a:t>
                       </a:r>
                       <a:endParaRPr lang="en-US" sz="1150" dirty="0">
                         <a:latin typeface="Calibri" charset="0"/>
@@ -15303,7 +15327,7 @@
                           <a:ea typeface="Calibri" pitchFamily="34" charset="-122"/>
                           <a:cs typeface="Calibri" pitchFamily="34" charset="-120"/>
                         </a:rPr>
-                        <a:t>+3.1%</a:t>
+                        <a:t>+3.5%</a:t>
                       </a:r>
                       <a:endParaRPr lang="en-US" sz="1150" dirty="0">
                         <a:latin typeface="Calibri" charset="0"/>
@@ -15371,7 +15395,7 @@
                           <a:ea typeface="Calibri" pitchFamily="34" charset="-122"/>
                           <a:cs typeface="Calibri" pitchFamily="34" charset="-120"/>
                         </a:rPr>
-                        <a:t>0.523</a:t>
+                        <a:t>0.519</a:t>
                       </a:r>
                       <a:endParaRPr lang="en-US" sz="1150" dirty="0">
                         <a:latin typeface="Calibri" charset="0"/>
@@ -15509,7 +15533,7 @@
                           <a:ea typeface="Calibri" pitchFamily="34" charset="-122"/>
                           <a:cs typeface="Calibri" pitchFamily="34" charset="-120"/>
                         </a:rPr>
-                        <a:t>52.3%</a:t>
+                        <a:t>50.8%</a:t>
                       </a:r>
                       <a:endParaRPr lang="en-US" sz="1150" dirty="0">
                         <a:latin typeface="Calibri" charset="0"/>
@@ -15645,7 +15669,7 @@
                           <a:ea typeface="Calibri" pitchFamily="34" charset="-122"/>
                           <a:cs typeface="Calibri" pitchFamily="34" charset="-120"/>
                         </a:rPr>
-                        <a:t>+1.9%</a:t>
+                        <a:t>+0.4%</a:t>
                       </a:r>
                       <a:endParaRPr lang="en-US" sz="1150" dirty="0">
                         <a:latin typeface="Calibri" charset="0"/>
@@ -15713,7 +15737,7 @@
                           <a:ea typeface="Calibri" pitchFamily="34" charset="-122"/>
                           <a:cs typeface="Calibri" pitchFamily="34" charset="-120"/>
                         </a:rPr>
-                        <a:t>0.554</a:t>
+                        <a:t>0.516</a:t>
                       </a:r>
                       <a:endParaRPr lang="en-US" sz="1150" dirty="0">
                         <a:latin typeface="Calibri" charset="0"/>
@@ -15899,7 +15923,7 @@
                 <a:ea typeface="Calibri" pitchFamily="34" charset="-122"/>
                 <a:cs typeface="Calibri" pitchFamily="34" charset="-120"/>
               </a:rPr>
-              <a:t>Only macro exceeds the base rate meaningfully, and 3.1 points on this sample is a hypothesis, not a finding.</a:t>
+              <a:t>Only macro exceeds the base rate meaningfully, and 3.5 points on 260 days is a hypothesis, not a finding.</a:t>
             </a:r>
             <a:endParaRPr lang="en-US" sz="1150" dirty="0"/>
           </a:p>
